--- a/宣道詩/(宣道詩84)時刻蒙恩.pptx
+++ b/宣道詩/(宣道詩84)時刻蒙恩.pptx
@@ -326,6 +326,11 @@
         </p:txBody>
       </p:sp>
     </p:spTree>
+    <p:extLst>
+      <p:ext uri="{BB962C8B-B14F-4D97-AF65-F5344CB8AC3E}">
+        <p14:creationId xmlns:p14="http://schemas.microsoft.com/office/powerpoint/2010/main" val="1"/>
+      </p:ext>
+    </p:extLst>
   </p:cSld>
   <p:clrMap bg1="lt1" tx1="dk1" bg2="lt2" tx2="dk2" accent1="accent1" accent2="accent2" accent3="accent3" accent4="accent4" accent5="accent5" accent6="accent6" hlink="hlink" folHlink="folHlink"/>
 </p:handoutMaster>
@@ -475,38 +480,37 @@
           <a:p>
             <a:pPr lvl="0"/>
             <a:r>
-              <a:rPr lang="zh-TW" altLang="en-US" smtClean="0"/>
+              <a:rPr lang="zh-TW" altLang="en-US"/>
               <a:t>按一下以編輯母片文字樣式</a:t>
             </a:r>
           </a:p>
           <a:p>
             <a:pPr lvl="1"/>
             <a:r>
-              <a:rPr lang="zh-TW" altLang="en-US" smtClean="0"/>
+              <a:rPr lang="zh-TW" altLang="en-US"/>
               <a:t>第二層</a:t>
             </a:r>
           </a:p>
           <a:p>
             <a:pPr lvl="2"/>
             <a:r>
-              <a:rPr lang="zh-TW" altLang="en-US" smtClean="0"/>
+              <a:rPr lang="zh-TW" altLang="en-US"/>
               <a:t>第三層</a:t>
             </a:r>
           </a:p>
           <a:p>
             <a:pPr lvl="3"/>
             <a:r>
-              <a:rPr lang="zh-TW" altLang="en-US" smtClean="0"/>
+              <a:rPr lang="zh-TW" altLang="en-US"/>
               <a:t>第四層</a:t>
             </a:r>
           </a:p>
           <a:p>
             <a:pPr lvl="4"/>
             <a:r>
-              <a:rPr lang="zh-TW" altLang="en-US" smtClean="0"/>
+              <a:rPr lang="zh-TW" altLang="en-US"/>
               <a:t>第五層</a:t>
             </a:r>
-            <a:endParaRPr lang="zh-TW" altLang="en-US"/>
           </a:p>
         </p:txBody>
       </p:sp>
@@ -712,7 +716,7 @@
           <a:lstStyle/>
           <a:p>
             <a:r>
-              <a:rPr lang="en-US" altLang="zh-TW" smtClean="0"/>
+              <a:rPr lang="en-US" altLang="zh-TW"/>
               <a:t>Click to edit Master title style</a:t>
             </a:r>
             <a:endParaRPr lang="zh-TW" altLang="en-US"/>
@@ -831,7 +835,7 @@
           </a:lstStyle>
           <a:p>
             <a:r>
-              <a:rPr lang="en-US" altLang="zh-TW" smtClean="0"/>
+              <a:rPr lang="en-US" altLang="zh-TW"/>
               <a:t>Click to edit Master subtitle style</a:t>
             </a:r>
             <a:endParaRPr lang="zh-TW" altLang="en-US"/>
@@ -954,7 +958,7 @@
           <a:lstStyle/>
           <a:p>
             <a:r>
-              <a:rPr lang="en-US" altLang="zh-TW" smtClean="0"/>
+              <a:rPr lang="en-US" altLang="zh-TW"/>
               <a:t>Click to edit Master title style</a:t>
             </a:r>
             <a:endParaRPr lang="zh-TW" altLang="en-US"/>
@@ -978,35 +982,35 @@
           <a:p>
             <a:pPr lvl="0"/>
             <a:r>
-              <a:rPr lang="en-US" altLang="zh-TW" smtClean="0"/>
+              <a:rPr lang="en-US" altLang="zh-TW"/>
               <a:t>Edit Master text styles</a:t>
             </a:r>
           </a:p>
           <a:p>
             <a:pPr lvl="1"/>
             <a:r>
-              <a:rPr lang="en-US" altLang="zh-TW" smtClean="0"/>
+              <a:rPr lang="en-US" altLang="zh-TW"/>
               <a:t>Second level</a:t>
             </a:r>
           </a:p>
           <a:p>
             <a:pPr lvl="2"/>
             <a:r>
-              <a:rPr lang="en-US" altLang="zh-TW" smtClean="0"/>
+              <a:rPr lang="en-US" altLang="zh-TW"/>
               <a:t>Third level</a:t>
             </a:r>
           </a:p>
           <a:p>
             <a:pPr lvl="3"/>
             <a:r>
-              <a:rPr lang="en-US" altLang="zh-TW" smtClean="0"/>
+              <a:rPr lang="en-US" altLang="zh-TW"/>
               <a:t>Fourth level</a:t>
             </a:r>
           </a:p>
           <a:p>
             <a:pPr lvl="4"/>
             <a:r>
-              <a:rPr lang="en-US" altLang="zh-TW" smtClean="0"/>
+              <a:rPr lang="en-US" altLang="zh-TW"/>
               <a:t>Fifth level</a:t>
             </a:r>
             <a:endParaRPr lang="zh-TW" altLang="en-US"/>
@@ -1134,7 +1138,7 @@
           <a:lstStyle/>
           <a:p>
             <a:r>
-              <a:rPr lang="en-US" altLang="zh-TW" smtClean="0"/>
+              <a:rPr lang="en-US" altLang="zh-TW"/>
               <a:t>Click to edit Master title style</a:t>
             </a:r>
             <a:endParaRPr lang="zh-TW" altLang="en-US"/>
@@ -1163,35 +1167,35 @@
           <a:p>
             <a:pPr lvl="0"/>
             <a:r>
-              <a:rPr lang="en-US" altLang="zh-TW" smtClean="0"/>
+              <a:rPr lang="en-US" altLang="zh-TW"/>
               <a:t>Edit Master text styles</a:t>
             </a:r>
           </a:p>
           <a:p>
             <a:pPr lvl="1"/>
             <a:r>
-              <a:rPr lang="en-US" altLang="zh-TW" smtClean="0"/>
+              <a:rPr lang="en-US" altLang="zh-TW"/>
               <a:t>Second level</a:t>
             </a:r>
           </a:p>
           <a:p>
             <a:pPr lvl="2"/>
             <a:r>
-              <a:rPr lang="en-US" altLang="zh-TW" smtClean="0"/>
+              <a:rPr lang="en-US" altLang="zh-TW"/>
               <a:t>Third level</a:t>
             </a:r>
           </a:p>
           <a:p>
             <a:pPr lvl="3"/>
             <a:r>
-              <a:rPr lang="en-US" altLang="zh-TW" smtClean="0"/>
+              <a:rPr lang="en-US" altLang="zh-TW"/>
               <a:t>Fourth level</a:t>
             </a:r>
           </a:p>
           <a:p>
             <a:pPr lvl="4"/>
             <a:r>
-              <a:rPr lang="en-US" altLang="zh-TW" smtClean="0"/>
+              <a:rPr lang="en-US" altLang="zh-TW"/>
               <a:t>Fifth level</a:t>
             </a:r>
             <a:endParaRPr lang="zh-TW" altLang="en-US"/>
@@ -1314,7 +1318,7 @@
           <a:lstStyle/>
           <a:p>
             <a:r>
-              <a:rPr lang="en-US" altLang="zh-TW" smtClean="0"/>
+              <a:rPr lang="en-US" altLang="zh-TW"/>
               <a:t>Click to edit Master title style</a:t>
             </a:r>
             <a:endParaRPr lang="zh-TW" altLang="en-US"/>
@@ -1338,35 +1342,35 @@
           <a:p>
             <a:pPr lvl="0"/>
             <a:r>
-              <a:rPr lang="en-US" altLang="zh-TW" smtClean="0"/>
+              <a:rPr lang="en-US" altLang="zh-TW"/>
               <a:t>Edit Master text styles</a:t>
             </a:r>
           </a:p>
           <a:p>
             <a:pPr lvl="1"/>
             <a:r>
-              <a:rPr lang="en-US" altLang="zh-TW" smtClean="0"/>
+              <a:rPr lang="en-US" altLang="zh-TW"/>
               <a:t>Second level</a:t>
             </a:r>
           </a:p>
           <a:p>
             <a:pPr lvl="2"/>
             <a:r>
-              <a:rPr lang="en-US" altLang="zh-TW" smtClean="0"/>
+              <a:rPr lang="en-US" altLang="zh-TW"/>
               <a:t>Third level</a:t>
             </a:r>
           </a:p>
           <a:p>
             <a:pPr lvl="3"/>
             <a:r>
-              <a:rPr lang="en-US" altLang="zh-TW" smtClean="0"/>
+              <a:rPr lang="en-US" altLang="zh-TW"/>
               <a:t>Fourth level</a:t>
             </a:r>
           </a:p>
           <a:p>
             <a:pPr lvl="4"/>
             <a:r>
-              <a:rPr lang="en-US" altLang="zh-TW" smtClean="0"/>
+              <a:rPr lang="en-US" altLang="zh-TW"/>
               <a:t>Fifth level</a:t>
             </a:r>
             <a:endParaRPr lang="zh-TW" altLang="en-US"/>
@@ -1498,7 +1502,7 @@
           </a:lstStyle>
           <a:p>
             <a:r>
-              <a:rPr lang="en-US" altLang="zh-TW" smtClean="0"/>
+              <a:rPr lang="en-US" altLang="zh-TW"/>
               <a:t>Click to edit Master title style</a:t>
             </a:r>
             <a:endParaRPr lang="zh-TW" altLang="en-US"/>
@@ -1618,7 +1622,7 @@
           <a:p>
             <a:pPr lvl="0"/>
             <a:r>
-              <a:rPr lang="en-US" altLang="zh-TW" smtClean="0"/>
+              <a:rPr lang="en-US" altLang="zh-TW"/>
               <a:t>Edit Master text styles</a:t>
             </a:r>
           </a:p>
@@ -1740,7 +1744,7 @@
           <a:lstStyle/>
           <a:p>
             <a:r>
-              <a:rPr lang="en-US" altLang="zh-TW" smtClean="0"/>
+              <a:rPr lang="en-US" altLang="zh-TW"/>
               <a:t>Click to edit Master title style</a:t>
             </a:r>
             <a:endParaRPr lang="zh-TW" altLang="en-US"/>
@@ -1797,35 +1801,35 @@
           <a:p>
             <a:pPr lvl="0"/>
             <a:r>
-              <a:rPr lang="en-US" altLang="zh-TW" smtClean="0"/>
+              <a:rPr lang="en-US" altLang="zh-TW"/>
               <a:t>Edit Master text styles</a:t>
             </a:r>
           </a:p>
           <a:p>
             <a:pPr lvl="1"/>
             <a:r>
-              <a:rPr lang="en-US" altLang="zh-TW" smtClean="0"/>
+              <a:rPr lang="en-US" altLang="zh-TW"/>
               <a:t>Second level</a:t>
             </a:r>
           </a:p>
           <a:p>
             <a:pPr lvl="2"/>
             <a:r>
-              <a:rPr lang="en-US" altLang="zh-TW" smtClean="0"/>
+              <a:rPr lang="en-US" altLang="zh-TW"/>
               <a:t>Third level</a:t>
             </a:r>
           </a:p>
           <a:p>
             <a:pPr lvl="3"/>
             <a:r>
-              <a:rPr lang="en-US" altLang="zh-TW" smtClean="0"/>
+              <a:rPr lang="en-US" altLang="zh-TW"/>
               <a:t>Fourth level</a:t>
             </a:r>
           </a:p>
           <a:p>
             <a:pPr lvl="4"/>
             <a:r>
-              <a:rPr lang="en-US" altLang="zh-TW" smtClean="0"/>
+              <a:rPr lang="en-US" altLang="zh-TW"/>
               <a:t>Fifth level</a:t>
             </a:r>
             <a:endParaRPr lang="zh-TW" altLang="en-US"/>
@@ -1882,35 +1886,35 @@
           <a:p>
             <a:pPr lvl="0"/>
             <a:r>
-              <a:rPr lang="en-US" altLang="zh-TW" smtClean="0"/>
+              <a:rPr lang="en-US" altLang="zh-TW"/>
               <a:t>Edit Master text styles</a:t>
             </a:r>
           </a:p>
           <a:p>
             <a:pPr lvl="1"/>
             <a:r>
-              <a:rPr lang="en-US" altLang="zh-TW" smtClean="0"/>
+              <a:rPr lang="en-US" altLang="zh-TW"/>
               <a:t>Second level</a:t>
             </a:r>
           </a:p>
           <a:p>
             <a:pPr lvl="2"/>
             <a:r>
-              <a:rPr lang="en-US" altLang="zh-TW" smtClean="0"/>
+              <a:rPr lang="en-US" altLang="zh-TW"/>
               <a:t>Third level</a:t>
             </a:r>
           </a:p>
           <a:p>
             <a:pPr lvl="3"/>
             <a:r>
-              <a:rPr lang="en-US" altLang="zh-TW" smtClean="0"/>
+              <a:rPr lang="en-US" altLang="zh-TW"/>
               <a:t>Fourth level</a:t>
             </a:r>
           </a:p>
           <a:p>
             <a:pPr lvl="4"/>
             <a:r>
-              <a:rPr lang="en-US" altLang="zh-TW" smtClean="0"/>
+              <a:rPr lang="en-US" altLang="zh-TW"/>
               <a:t>Fifth level</a:t>
             </a:r>
             <a:endParaRPr lang="zh-TW" altLang="en-US"/>
@@ -2037,7 +2041,7 @@
           </a:lstStyle>
           <a:p>
             <a:r>
-              <a:rPr lang="en-US" altLang="zh-TW" smtClean="0"/>
+              <a:rPr lang="en-US" altLang="zh-TW"/>
               <a:t>Click to edit Master title style</a:t>
             </a:r>
             <a:endParaRPr lang="zh-TW" altLang="en-US"/>
@@ -2103,7 +2107,7 @@
           <a:p>
             <a:pPr lvl="0"/>
             <a:r>
-              <a:rPr lang="en-US" altLang="zh-TW" smtClean="0"/>
+              <a:rPr lang="en-US" altLang="zh-TW"/>
               <a:t>Edit Master text styles</a:t>
             </a:r>
           </a:p>
@@ -2159,35 +2163,35 @@
           <a:p>
             <a:pPr lvl="0"/>
             <a:r>
-              <a:rPr lang="en-US" altLang="zh-TW" smtClean="0"/>
+              <a:rPr lang="en-US" altLang="zh-TW"/>
               <a:t>Edit Master text styles</a:t>
             </a:r>
           </a:p>
           <a:p>
             <a:pPr lvl="1"/>
             <a:r>
-              <a:rPr lang="en-US" altLang="zh-TW" smtClean="0"/>
+              <a:rPr lang="en-US" altLang="zh-TW"/>
               <a:t>Second level</a:t>
             </a:r>
           </a:p>
           <a:p>
             <a:pPr lvl="2"/>
             <a:r>
-              <a:rPr lang="en-US" altLang="zh-TW" smtClean="0"/>
+              <a:rPr lang="en-US" altLang="zh-TW"/>
               <a:t>Third level</a:t>
             </a:r>
           </a:p>
           <a:p>
             <a:pPr lvl="3"/>
             <a:r>
-              <a:rPr lang="en-US" altLang="zh-TW" smtClean="0"/>
+              <a:rPr lang="en-US" altLang="zh-TW"/>
               <a:t>Fourth level</a:t>
             </a:r>
           </a:p>
           <a:p>
             <a:pPr lvl="4"/>
             <a:r>
-              <a:rPr lang="en-US" altLang="zh-TW" smtClean="0"/>
+              <a:rPr lang="en-US" altLang="zh-TW"/>
               <a:t>Fifth level</a:t>
             </a:r>
             <a:endParaRPr lang="zh-TW" altLang="en-US"/>
@@ -2253,7 +2257,7 @@
           <a:p>
             <a:pPr lvl="0"/>
             <a:r>
-              <a:rPr lang="en-US" altLang="zh-TW" smtClean="0"/>
+              <a:rPr lang="en-US" altLang="zh-TW"/>
               <a:t>Edit Master text styles</a:t>
             </a:r>
           </a:p>
@@ -2309,35 +2313,35 @@
           <a:p>
             <a:pPr lvl="0"/>
             <a:r>
-              <a:rPr lang="en-US" altLang="zh-TW" smtClean="0"/>
+              <a:rPr lang="en-US" altLang="zh-TW"/>
               <a:t>Edit Master text styles</a:t>
             </a:r>
           </a:p>
           <a:p>
             <a:pPr lvl="1"/>
             <a:r>
-              <a:rPr lang="en-US" altLang="zh-TW" smtClean="0"/>
+              <a:rPr lang="en-US" altLang="zh-TW"/>
               <a:t>Second level</a:t>
             </a:r>
           </a:p>
           <a:p>
             <a:pPr lvl="2"/>
             <a:r>
-              <a:rPr lang="en-US" altLang="zh-TW" smtClean="0"/>
+              <a:rPr lang="en-US" altLang="zh-TW"/>
               <a:t>Third level</a:t>
             </a:r>
           </a:p>
           <a:p>
             <a:pPr lvl="3"/>
             <a:r>
-              <a:rPr lang="en-US" altLang="zh-TW" smtClean="0"/>
+              <a:rPr lang="en-US" altLang="zh-TW"/>
               <a:t>Fourth level</a:t>
             </a:r>
           </a:p>
           <a:p>
             <a:pPr lvl="4"/>
             <a:r>
-              <a:rPr lang="en-US" altLang="zh-TW" smtClean="0"/>
+              <a:rPr lang="en-US" altLang="zh-TW"/>
               <a:t>Fifth level</a:t>
             </a:r>
             <a:endParaRPr lang="zh-TW" altLang="en-US"/>
@@ -2460,7 +2464,7 @@
           <a:lstStyle/>
           <a:p>
             <a:r>
-              <a:rPr lang="en-US" altLang="zh-TW" smtClean="0"/>
+              <a:rPr lang="en-US" altLang="zh-TW"/>
               <a:t>Click to edit Master title style</a:t>
             </a:r>
             <a:endParaRPr lang="zh-TW" altLang="en-US"/>
@@ -2692,7 +2696,7 @@
           </a:lstStyle>
           <a:p>
             <a:r>
-              <a:rPr lang="en-US" altLang="zh-TW" smtClean="0"/>
+              <a:rPr lang="en-US" altLang="zh-TW"/>
               <a:t>Click to edit Master title style</a:t>
             </a:r>
             <a:endParaRPr lang="zh-TW" altLang="en-US"/>
@@ -2749,35 +2753,35 @@
           <a:p>
             <a:pPr lvl="0"/>
             <a:r>
-              <a:rPr lang="en-US" altLang="zh-TW" smtClean="0"/>
+              <a:rPr lang="en-US" altLang="zh-TW"/>
               <a:t>Edit Master text styles</a:t>
             </a:r>
           </a:p>
           <a:p>
             <a:pPr lvl="1"/>
             <a:r>
-              <a:rPr lang="en-US" altLang="zh-TW" smtClean="0"/>
+              <a:rPr lang="en-US" altLang="zh-TW"/>
               <a:t>Second level</a:t>
             </a:r>
           </a:p>
           <a:p>
             <a:pPr lvl="2"/>
             <a:r>
-              <a:rPr lang="en-US" altLang="zh-TW" smtClean="0"/>
+              <a:rPr lang="en-US" altLang="zh-TW"/>
               <a:t>Third level</a:t>
             </a:r>
           </a:p>
           <a:p>
             <a:pPr lvl="3"/>
             <a:r>
-              <a:rPr lang="en-US" altLang="zh-TW" smtClean="0"/>
+              <a:rPr lang="en-US" altLang="zh-TW"/>
               <a:t>Fourth level</a:t>
             </a:r>
           </a:p>
           <a:p>
             <a:pPr lvl="4"/>
             <a:r>
-              <a:rPr lang="en-US" altLang="zh-TW" smtClean="0"/>
+              <a:rPr lang="en-US" altLang="zh-TW"/>
               <a:t>Fifth level</a:t>
             </a:r>
             <a:endParaRPr lang="zh-TW" altLang="en-US"/>
@@ -2843,7 +2847,7 @@
           <a:p>
             <a:pPr lvl="0"/>
             <a:r>
-              <a:rPr lang="en-US" altLang="zh-TW" smtClean="0"/>
+              <a:rPr lang="en-US" altLang="zh-TW"/>
               <a:t>Edit Master text styles</a:t>
             </a:r>
           </a:p>
@@ -2974,7 +2978,7 @@
           </a:lstStyle>
           <a:p>
             <a:r>
-              <a:rPr lang="en-US" altLang="zh-TW" smtClean="0"/>
+              <a:rPr lang="en-US" altLang="zh-TW"/>
               <a:t>Click to edit Master title style</a:t>
             </a:r>
             <a:endParaRPr lang="zh-TW" altLang="en-US"/>
@@ -3039,7 +3043,7 @@
           </a:lstStyle>
           <a:p>
             <a:r>
-              <a:rPr lang="en-US" altLang="zh-TW" smtClean="0"/>
+              <a:rPr lang="en-US" altLang="zh-TW"/>
               <a:t>Click icon to add picture</a:t>
             </a:r>
             <a:endParaRPr lang="zh-TW" altLang="en-US"/>
@@ -3105,7 +3109,7 @@
           <a:p>
             <a:pPr lvl="0"/>
             <a:r>
-              <a:rPr lang="en-US" altLang="zh-TW" smtClean="0"/>
+              <a:rPr lang="en-US" altLang="zh-TW"/>
               <a:t>Edit Master text styles</a:t>
             </a:r>
           </a:p>
@@ -3247,10 +3251,9 @@
           <a:lstStyle/>
           <a:p>
             <a:r>
-              <a:rPr lang="zh-TW" altLang="en-US" smtClean="0"/>
+              <a:rPr lang="zh-TW" altLang="en-US"/>
               <a:t>按一下以編輯母片標題樣式</a:t>
             </a:r>
-            <a:endParaRPr lang="zh-TW" altLang="en-US"/>
           </a:p>
         </p:txBody>
       </p:sp>
@@ -3281,38 +3284,37 @@
           <a:p>
             <a:pPr lvl="0"/>
             <a:r>
-              <a:rPr lang="zh-TW" altLang="en-US" smtClean="0"/>
+              <a:rPr lang="zh-TW" altLang="en-US"/>
               <a:t>按一下以編輯母片文字樣式</a:t>
             </a:r>
           </a:p>
           <a:p>
             <a:pPr lvl="1"/>
             <a:r>
-              <a:rPr lang="zh-TW" altLang="en-US" smtClean="0"/>
+              <a:rPr lang="zh-TW" altLang="en-US"/>
               <a:t>第二層</a:t>
             </a:r>
           </a:p>
           <a:p>
             <a:pPr lvl="2"/>
             <a:r>
-              <a:rPr lang="zh-TW" altLang="en-US" smtClean="0"/>
+              <a:rPr lang="zh-TW" altLang="en-US"/>
               <a:t>第三層</a:t>
             </a:r>
           </a:p>
           <a:p>
             <a:pPr lvl="3"/>
             <a:r>
-              <a:rPr lang="zh-TW" altLang="en-US" smtClean="0"/>
+              <a:rPr lang="zh-TW" altLang="en-US"/>
               <a:t>第四層</a:t>
             </a:r>
           </a:p>
           <a:p>
             <a:pPr lvl="4"/>
             <a:r>
-              <a:rPr lang="zh-TW" altLang="en-US" smtClean="0"/>
+              <a:rPr lang="zh-TW" altLang="en-US"/>
               <a:t>第五層</a:t>
             </a:r>
-            <a:endParaRPr lang="zh-TW" altLang="en-US"/>
           </a:p>
         </p:txBody>
       </p:sp>
@@ -3787,23 +3789,6 @@
               </a:rPr>
               <a:t>84</a:t>
             </a:r>
-            <a:r>
-              <a:rPr lang="en-US" altLang="zh-CN" sz="7200" b="1" i="1" dirty="0">
-                <a:solidFill>
-                  <a:srgbClr val="660033"/>
-                </a:solidFill>
-                <a:effectLst>
-                  <a:outerShdw blurRad="38100" dist="38100" dir="2700000" algn="tl">
-                    <a:srgbClr val="000000">
-                      <a:alpha val="43137"/>
-                    </a:srgbClr>
-                  </a:outerShdw>
-                </a:effectLst>
-                <a:latin typeface="微軟正黑體" pitchFamily="34" charset="-120"/>
-                <a:ea typeface="微軟正黑體" pitchFamily="34" charset="-120"/>
-              </a:rPr>
-              <a:t/>
-            </a:r>
             <a:br>
               <a:rPr lang="en-US" altLang="zh-CN" sz="7200" b="1" i="1" dirty="0">
                 <a:solidFill>
@@ -3864,13 +3849,6 @@
   <p:clrMapOvr>
     <a:masterClrMapping/>
   </p:clrMapOvr>
-  <p:timing>
-    <p:tnLst>
-      <p:par>
-        <p:cTn id="1" dur="indefinite" restart="never" nodeType="tmRoot"/>
-      </p:par>
-    </p:tnLst>
-  </p:timing>
 </p:sld>
 </file>
 
@@ -3975,34 +3953,14 @@
           <a:p>
             <a:pPr algn="ctr"/>
             <a:r>
-              <a:rPr lang="en-US" sz="4800" b="1" dirty="0" smtClean="0">
+              <a:rPr lang="en-US" sz="4800" b="1" dirty="0">
                 <a:solidFill>
                   <a:srgbClr val="660033"/>
                 </a:solidFill>
                 <a:effectLst/>
                 <a:latin typeface="+mn-lt"/>
               </a:rPr>
-              <a:t>( </a:t>
-            </a:r>
-            <a:r>
-              <a:rPr lang="en-US" sz="4800" b="1" dirty="0" smtClean="0">
-                <a:solidFill>
-                  <a:srgbClr val="660033"/>
-                </a:solidFill>
-                <a:effectLst/>
-                <a:latin typeface="+mn-lt"/>
-              </a:rPr>
-              <a:t>3 </a:t>
-            </a:r>
-            <a:r>
-              <a:rPr lang="en-US" sz="4800" b="1" dirty="0" smtClean="0">
-                <a:solidFill>
-                  <a:srgbClr val="660033"/>
-                </a:solidFill>
-                <a:effectLst/>
-                <a:latin typeface="+mn-lt"/>
-              </a:rPr>
-              <a:t>)</a:t>
+              <a:t>( 3 / 4 )</a:t>
             </a:r>
             <a:endParaRPr lang="vi-VN" sz="4800" b="1" dirty="0">
               <a:solidFill>
@@ -4143,34 +4101,14 @@
           <a:p>
             <a:pPr algn="ctr"/>
             <a:r>
-              <a:rPr lang="en-US" sz="4800" b="1" dirty="0" smtClean="0">
+              <a:rPr lang="en-US" sz="4800" b="1" dirty="0">
                 <a:solidFill>
                   <a:srgbClr val="660033"/>
                 </a:solidFill>
                 <a:effectLst/>
                 <a:latin typeface="+mn-lt"/>
               </a:rPr>
-              <a:t>( </a:t>
-            </a:r>
-            <a:r>
-              <a:rPr lang="en-US" sz="4800" b="1" dirty="0" smtClean="0">
-                <a:solidFill>
-                  <a:srgbClr val="660033"/>
-                </a:solidFill>
-                <a:effectLst/>
-                <a:latin typeface="+mn-lt"/>
-              </a:rPr>
-              <a:t>3 </a:t>
-            </a:r>
-            <a:r>
-              <a:rPr lang="en-US" sz="4800" b="1" dirty="0" smtClean="0">
-                <a:solidFill>
-                  <a:srgbClr val="660033"/>
-                </a:solidFill>
-                <a:effectLst/>
-                <a:latin typeface="+mn-lt"/>
-              </a:rPr>
-              <a:t>)</a:t>
+              <a:t>( 3 / 4 )</a:t>
             </a:r>
             <a:endParaRPr lang="vi-VN" sz="4800" b="1" dirty="0">
               <a:solidFill>
@@ -4493,34 +4431,14 @@
           <a:p>
             <a:pPr algn="ctr"/>
             <a:r>
-              <a:rPr lang="en-US" sz="4800" b="1" dirty="0" smtClean="0">
+              <a:rPr lang="en-US" sz="4800" b="1" dirty="0">
                 <a:solidFill>
                   <a:srgbClr val="660033"/>
                 </a:solidFill>
                 <a:effectLst/>
                 <a:latin typeface="+mn-lt"/>
               </a:rPr>
-              <a:t>( </a:t>
-            </a:r>
-            <a:r>
-              <a:rPr lang="en-US" sz="4800" b="1" dirty="0" smtClean="0">
-                <a:solidFill>
-                  <a:srgbClr val="660033"/>
-                </a:solidFill>
-                <a:effectLst/>
-                <a:latin typeface="+mn-lt"/>
-              </a:rPr>
-              <a:t>4 </a:t>
-            </a:r>
-            <a:r>
-              <a:rPr lang="en-US" sz="4800" b="1" dirty="0" smtClean="0">
-                <a:solidFill>
-                  <a:srgbClr val="660033"/>
-                </a:solidFill>
-                <a:effectLst/>
-                <a:latin typeface="+mn-lt"/>
-              </a:rPr>
-              <a:t>)</a:t>
+              <a:t>( 4 / 4 )</a:t>
             </a:r>
             <a:endParaRPr lang="vi-VN" sz="4800" b="1" dirty="0">
               <a:solidFill>
@@ -4639,34 +4557,14 @@
           <a:p>
             <a:pPr algn="ctr"/>
             <a:r>
-              <a:rPr lang="en-US" sz="4800" b="1" dirty="0" smtClean="0">
+              <a:rPr lang="en-US" sz="4800" b="1" dirty="0">
                 <a:solidFill>
                   <a:srgbClr val="660033"/>
                 </a:solidFill>
                 <a:effectLst/>
                 <a:latin typeface="+mn-lt"/>
               </a:rPr>
-              <a:t>( </a:t>
-            </a:r>
-            <a:r>
-              <a:rPr lang="en-US" sz="4800" b="1" dirty="0" smtClean="0">
-                <a:solidFill>
-                  <a:srgbClr val="660033"/>
-                </a:solidFill>
-                <a:effectLst/>
-                <a:latin typeface="+mn-lt"/>
-              </a:rPr>
-              <a:t>4 </a:t>
-            </a:r>
-            <a:r>
-              <a:rPr lang="en-US" sz="4800" b="1" dirty="0" smtClean="0">
-                <a:solidFill>
-                  <a:srgbClr val="660033"/>
-                </a:solidFill>
-                <a:effectLst/>
-                <a:latin typeface="+mn-lt"/>
-              </a:rPr>
-              <a:t>)</a:t>
+              <a:t>( 4 / 4 )</a:t>
             </a:r>
             <a:endParaRPr lang="vi-VN" sz="4800" b="1" dirty="0">
               <a:solidFill>
@@ -4989,14 +4887,14 @@
           <a:p>
             <a:pPr algn="ctr"/>
             <a:r>
-              <a:rPr lang="en-US" sz="4800" b="1" dirty="0" smtClean="0">
+              <a:rPr lang="en-US" sz="4800" b="1" dirty="0">
                 <a:solidFill>
                   <a:srgbClr val="660033"/>
                 </a:solidFill>
                 <a:effectLst/>
                 <a:latin typeface="+mn-lt"/>
               </a:rPr>
-              <a:t>( 1 )</a:t>
+              <a:t>( 1 / 4 )</a:t>
             </a:r>
             <a:endParaRPr lang="vi-VN" sz="4800" b="1" dirty="0">
               <a:solidFill>
@@ -5144,14 +5042,14 @@
           <a:p>
             <a:pPr algn="ctr"/>
             <a:r>
-              <a:rPr lang="en-US" sz="4800" b="1" dirty="0" smtClean="0">
+              <a:rPr lang="en-US" sz="4800" b="1" dirty="0">
                 <a:solidFill>
                   <a:srgbClr val="660033"/>
                 </a:solidFill>
                 <a:effectLst/>
                 <a:latin typeface="+mn-lt"/>
               </a:rPr>
-              <a:t>( 1 )</a:t>
+              <a:t>( 1 / 4 )</a:t>
             </a:r>
             <a:endParaRPr lang="vi-VN" sz="4800" b="1" dirty="0">
               <a:solidFill>
@@ -5474,34 +5372,14 @@
           <a:p>
             <a:pPr algn="ctr"/>
             <a:r>
-              <a:rPr lang="en-US" sz="4800" b="1" dirty="0" smtClean="0">
+              <a:rPr lang="en-US" sz="4800" b="1" dirty="0">
                 <a:solidFill>
                   <a:srgbClr val="660033"/>
                 </a:solidFill>
                 <a:effectLst/>
                 <a:latin typeface="+mn-lt"/>
               </a:rPr>
-              <a:t>( </a:t>
-            </a:r>
-            <a:r>
-              <a:rPr lang="en-US" sz="4800" b="1" dirty="0" smtClean="0">
-                <a:solidFill>
-                  <a:srgbClr val="660033"/>
-                </a:solidFill>
-                <a:effectLst/>
-                <a:latin typeface="+mn-lt"/>
-              </a:rPr>
-              <a:t>2 </a:t>
-            </a:r>
-            <a:r>
-              <a:rPr lang="en-US" sz="4800" b="1" dirty="0" smtClean="0">
-                <a:solidFill>
-                  <a:srgbClr val="660033"/>
-                </a:solidFill>
-                <a:effectLst/>
-                <a:latin typeface="+mn-lt"/>
-              </a:rPr>
-              <a:t>)</a:t>
+              <a:t>( 2 / 4 )</a:t>
             </a:r>
             <a:endParaRPr lang="vi-VN" sz="4800" b="1" dirty="0">
               <a:solidFill>
@@ -5620,34 +5498,14 @@
           <a:p>
             <a:pPr algn="ctr"/>
             <a:r>
-              <a:rPr lang="en-US" sz="4800" b="1" dirty="0" smtClean="0">
+              <a:rPr lang="en-US" sz="4800" b="1" dirty="0">
                 <a:solidFill>
                   <a:srgbClr val="660033"/>
                 </a:solidFill>
                 <a:effectLst/>
                 <a:latin typeface="+mn-lt"/>
               </a:rPr>
-              <a:t>( </a:t>
-            </a:r>
-            <a:r>
-              <a:rPr lang="en-US" sz="4800" b="1" dirty="0" smtClean="0">
-                <a:solidFill>
-                  <a:srgbClr val="660033"/>
-                </a:solidFill>
-                <a:effectLst/>
-                <a:latin typeface="+mn-lt"/>
-              </a:rPr>
-              <a:t>2 </a:t>
-            </a:r>
-            <a:r>
-              <a:rPr lang="en-US" sz="4800" b="1" dirty="0" smtClean="0">
-                <a:solidFill>
-                  <a:srgbClr val="660033"/>
-                </a:solidFill>
-                <a:effectLst/>
-                <a:latin typeface="+mn-lt"/>
-              </a:rPr>
-              <a:t>)</a:t>
+              <a:t>( 2 / 4 )</a:t>
             </a:r>
             <a:endParaRPr lang="vi-VN" sz="4800" b="1" dirty="0">
               <a:solidFill>
